--- a/tests/output/check_tool/deck.pptx
+++ b/tests/output/check_tool/deck.pptx
@@ -3111,15 +3111,14 @@
           </a:bodyPr>
           <a:lstStyle/>
           <a:p>
-            <a:pPr algn="l">
-              <a:defRPr sz="1800" b="0" i="0">
+            <a:pPr algn="l"/>
+            <a:r>
+              <a:rPr sz="1800" b="0" i="0">
                 <a:solidFill>
                   <a:srgbClr val="000000"/>
                 </a:solidFill>
                 <a:latin typeface="Microsoft YaHei UI"/>
-              </a:defRPr>
-            </a:pPr>
-            <a:r>
+              </a:rPr>
               <a:t>Cover</a:t>
             </a:r>
           </a:p>
@@ -3165,15 +3164,14 @@
           </a:bodyPr>
           <a:lstStyle/>
           <a:p>
-            <a:pPr algn="l">
-              <a:defRPr sz="1800" b="0" i="0">
+            <a:pPr algn="l"/>
+            <a:r>
+              <a:rPr sz="1800" b="0" i="0">
                 <a:solidFill>
                   <a:srgbClr val="000000"/>
                 </a:solidFill>
                 <a:latin typeface="Microsoft YaHei UI"/>
-              </a:defRPr>
-            </a:pPr>
-            <a:r>
+              </a:rPr>
               <a:t>Content</a:t>
             </a:r>
           </a:p>

--- a/tests/output/check_tool/deck.pptx
+++ b/tests/output/check_tool/deck.pptx
@@ -3106,7 +3106,7 @@
           <a:noFill/>
         </p:spPr>
         <p:txBody>
-          <a:bodyPr wrap="square" anchor="t">
+          <a:bodyPr wrap="square" lIns="90000" rIns="90000" tIns="54000" bIns="54000" anchor="ctr">
             <a:spAutoFit/>
           </a:bodyPr>
           <a:lstStyle/>
@@ -3159,7 +3159,7 @@
           <a:noFill/>
         </p:spPr>
         <p:txBody>
-          <a:bodyPr wrap="square" anchor="t">
+          <a:bodyPr wrap="square" lIns="90000" rIns="90000" tIns="54000" bIns="54000" anchor="ctr">
             <a:spAutoFit/>
           </a:bodyPr>
           <a:lstStyle/>

--- a/tests/output/check_tool/deck.pptx
+++ b/tests/output/check_tool/deck.pptx
@@ -8,7 +8,7 @@
     <p:sldId id="256" r:id="rId7"/>
     <p:sldId id="257" r:id="rId8"/>
   </p:sldIdLst>
-  <p:sldSz cx="9144000" cy="5112000" type="screen4x3"/>
+  <p:sldSz cx="9144000" cy="5143500" type="screen4x3"/>
   <p:notesSz cx="6858000" cy="9144000"/>
   <p:defaultTextStyle>
     <a:defPPr>
@@ -3082,6 +3082,14 @@
 <file path=ppt/slides/slide1.xml><?xml version="1.0" encoding="utf-8"?>
 <p:sld xmlns:a="http://schemas.openxmlformats.org/drawingml/2006/main" xmlns:p="http://schemas.openxmlformats.org/presentationml/2006/main" xmlns:r="http://schemas.openxmlformats.org/officeDocument/2006/relationships">
   <p:cSld>
+    <p:bg>
+      <p:bgPr>
+        <a:solidFill>
+          <a:srgbClr val="FFFFFF"/>
+        </a:solidFill>
+        <a:effectLst/>
+      </p:bgPr>
+    </p:bg>
     <p:spTree>
       <p:nvGrpSpPr>
         <p:cNvPr id="1" name=""/>
@@ -3136,6 +3144,14 @@
 <file path=ppt/slides/slide2.xml><?xml version="1.0" encoding="utf-8"?>
 <p:sld xmlns:a="http://schemas.openxmlformats.org/drawingml/2006/main" xmlns:p="http://schemas.openxmlformats.org/presentationml/2006/main" xmlns:r="http://schemas.openxmlformats.org/officeDocument/2006/relationships">
   <p:cSld>
+    <p:bg>
+      <p:bgPr>
+        <a:solidFill>
+          <a:srgbClr val="FFFFFF"/>
+        </a:solidFill>
+        <a:effectLst/>
+      </p:bgPr>
+    </p:bg>
     <p:spTree>
       <p:nvGrpSpPr>
         <p:cNvPr id="1" name=""/>
